--- a/yocto_training_all_session_decks/session_decks/D1S8_Recap.pptx
+++ b/yocto_training_all_session_decks/session_decks/D1S8_Recap.pptx
@@ -5,22 +5,22 @@
     <p:sldMasterId id="2147483648" r:id="rId1"/>
   </p:sldMasterIdLst>
   <p:notesMasterIdLst>
-    <p:notesMasterId r:id="rId8"/>
+    <p:notesMasterId r:id="rId7"/>
   </p:notesMasterIdLst>
   <p:handoutMasterIdLst>
-    <p:handoutMasterId r:id="rId9"/>
+    <p:handoutMasterId r:id="rId8"/>
   </p:handoutMasterIdLst>
   <p:sldIdLst>
-    <p:sldId id="1007" r:id="rId18"/>
-    <p:sldId id="1008" r:id="rId19"/>
-    <p:sldId id="1009" r:id="rId20"/>
-    <p:sldId id="1010" r:id="rId21"/>
-    <p:sldId id="1011" r:id="rId22"/>
+    <p:sldId id="1007" r:id="rId2"/>
+    <p:sldId id="1008" r:id="rId3"/>
+    <p:sldId id="1009" r:id="rId4"/>
+    <p:sldId id="1010" r:id="rId5"/>
+    <p:sldId id="1011" r:id="rId6"/>
   </p:sldIdLst>
   <p:sldSz cx="12192000" cy="6858000"/>
   <p:notesSz cx="6858000" cy="9144000"/>
   <p:custDataLst>
-    <p:tags r:id="rId10"/>
+    <p:tags r:id="rId9"/>
   </p:custDataLst>
   <p:defaultTextStyle>
     <a:defPPr>
@@ -2926,7 +2926,7 @@
           <a:p>
             <a:fld id="{0CEC647C-F50C-4F78-AA33-D7AA6CDA18EE}" type="datetimeFigureOut">
               <a:rPr lang="en-US" smtClean="0"/>
-              <a:t>7/13/2025</a:t>
+              <a:t>6/8/2026</a:t>
             </a:fld>
             <a:endParaRPr lang="en-US"/>
           </a:p>
@@ -3091,7 +3091,7 @@
           <a:p>
             <a:fld id="{3A83341F-E62C-483B-84B4-966F8BE46097}" type="datetimeFigureOut">
               <a:rPr lang="en-US" smtClean="0"/>
-              <a:t>7/13/2025</a:t>
+              <a:t>6/8/2026</a:t>
             </a:fld>
             <a:endParaRPr lang="en-US"/>
           </a:p>
@@ -5175,8 +5175,8 @@
 </p:sldMaster>
 </file>
 
-<file path=ppt/slides/slide10.xml><?xml version="1.0" encoding="utf-8"?>
-<p:sld xmlns:a="http://schemas.openxmlformats.org/drawingml/2006/main" xmlns:p="http://schemas.openxmlformats.org/presentationml/2006/main" xmlns:r="http://schemas.openxmlformats.org/officeDocument/2006/relationships">
+<file path=ppt/slides/slide1.xml><?xml version="1.0" encoding="utf-8"?>
+<p:sld xmlns:a="http://schemas.openxmlformats.org/drawingml/2006/main" xmlns:r="http://schemas.openxmlformats.org/officeDocument/2006/relationships" xmlns:p="http://schemas.openxmlformats.org/presentationml/2006/main">
   <p:cSld>
     <p:spTree>
       <p:nvGrpSpPr>
@@ -5184,7 +5184,93 @@
         <p:cNvGrpSpPr/>
         <p:nvPr/>
       </p:nvGrpSpPr>
-      <p:grpSpPr/>
+      <p:grpSpPr>
+        <a:xfrm>
+          <a:off x="0" y="0"/>
+          <a:ext cx="0" cy="0"/>
+          <a:chOff x="0" y="0"/>
+          <a:chExt cx="0" cy="0"/>
+        </a:xfrm>
+      </p:grpSpPr>
+      <p:sp>
+        <p:nvSpPr>
+          <p:cNvPr id="2" name="Title 1"/>
+          <p:cNvSpPr>
+            <a:spLocks noGrp="1"/>
+          </p:cNvSpPr>
+          <p:nvPr>
+            <p:ph type="ctrTitle"/>
+          </p:nvPr>
+        </p:nvSpPr>
+        <p:spPr/>
+        <p:txBody>
+          <a:bodyPr/>
+          <a:lstStyle/>
+          <a:p>
+            <a:r>
+              <a:rPr sz="4400" b="1">
+                <a:solidFill>
+                  <a:srgbClr val="FFFFFF"/>
+                </a:solidFill>
+                <a:latin typeface="Calibri"/>
+              </a:rPr>
+              <a:t>Day 1 Recap &amp; Day 2 Preview</a:t>
+            </a:r>
+          </a:p>
+        </p:txBody>
+      </p:sp>
+      <p:sp>
+        <p:nvSpPr>
+          <p:cNvPr id="3" name="Subtitle 2"/>
+          <p:cNvSpPr>
+            <a:spLocks noGrp="1"/>
+          </p:cNvSpPr>
+          <p:nvPr>
+            <p:ph type="subTitle" idx="1"/>
+          </p:nvPr>
+        </p:nvSpPr>
+        <p:spPr/>
+        <p:txBody>
+          <a:bodyPr/>
+          <a:lstStyle/>
+          <a:p>
+            <a:r>
+              <a:rPr sz="1800" dirty="0">
+                <a:solidFill>
+                  <a:srgbClr val="FFFFFF"/>
+                </a:solidFill>
+                <a:latin typeface="Calibri"/>
+              </a:rPr>
+              <a:t>What you learned, what's next</a:t>
+            </a:r>
+          </a:p>
+        </p:txBody>
+      </p:sp>
+    </p:spTree>
+  </p:cSld>
+  <p:clrMapOvr>
+    <a:masterClrMapping/>
+  </p:clrMapOvr>
+</p:sld>
+</file>
+
+<file path=ppt/slides/slide2.xml><?xml version="1.0" encoding="utf-8"?>
+<p:sld xmlns:a="http://schemas.openxmlformats.org/drawingml/2006/main" xmlns:r="http://schemas.openxmlformats.org/officeDocument/2006/relationships" xmlns:p="http://schemas.openxmlformats.org/presentationml/2006/main">
+  <p:cSld>
+    <p:spTree>
+      <p:nvGrpSpPr>
+        <p:cNvPr id="1" name=""/>
+        <p:cNvGrpSpPr/>
+        <p:nvPr/>
+      </p:nvGrpSpPr>
+      <p:grpSpPr>
+        <a:xfrm>
+          <a:off x="0" y="0"/>
+          <a:ext cx="0" cy="0"/>
+          <a:chOff x="0" y="0"/>
+          <a:chExt cx="0" cy="0"/>
+        </a:xfrm>
+      </p:grpSpPr>
       <p:sp>
         <p:nvSpPr>
           <p:cNvPr id="2" name="Title 1"/>
@@ -5201,13 +5287,10 @@
           <a:lstStyle/>
           <a:p>
             <a:r>
-              <a:rPr sz="3200" b="1">
-                <a:solidFill>
-                  <a:srgbClr val="CC0066"/>
-                </a:solidFill>
+              <a:rPr sz="3200" b="1" dirty="0">
                 <a:latin typeface="Calibri"/>
               </a:rPr>
-              <a:t>Day 2 Preview</a:t>
+              <a:t>Session Agenda</a:t>
             </a:r>
           </a:p>
         </p:txBody>
@@ -5220,43 +5303,8 @@
         </p:nvSpPr>
         <p:spPr>
           <a:xfrm>
-            <a:off x="822960" y="1417320"/>
-            <a:ext cx="10515600" cy="365760"/>
-          </a:xfrm>
-          <a:prstGeom prst="rect">
-            <a:avLst/>
-          </a:prstGeom>
-          <a:noFill/>
-        </p:spPr>
-        <p:txBody>
-          <a:bodyPr wrap="square" anchor="t" lIns="45720" rIns="45720">
-            <a:spAutoFit/>
-          </a:bodyPr>
-          <a:lstStyle/>
-          <a:p>
-            <a:pPr algn="l"/>
-            <a:r>
-              <a:rPr sz="1500" b="0" i="1">
-                <a:solidFill>
-                  <a:srgbClr val="666666"/>
-                </a:solidFill>
-                <a:latin typeface="Calibri"/>
-              </a:rPr>
-              <a:t>What we'll cover tomorrow.</a:t>
-            </a:r>
-          </a:p>
-        </p:txBody>
-      </p:sp>
-      <p:sp>
-        <p:nvSpPr>
-          <p:cNvPr id="4" name="TextBox 3"/>
-          <p:cNvSpPr txBox="1"/>
-          <p:nvPr/>
-        </p:nvSpPr>
-        <p:spPr>
-          <a:xfrm>
-            <a:off x="822960" y="1783080"/>
-            <a:ext cx="10515600" cy="4572000"/>
+            <a:off x="822960" y="1463040"/>
+            <a:ext cx="10515600" cy="5029200"/>
           </a:xfrm>
           <a:prstGeom prst="rect">
             <a:avLst/>
@@ -5275,77 +5323,13 @@
               </a:spcAft>
             </a:pPr>
             <a:r>
-              <a:rPr sz="1600" b="1" i="0">
-                <a:solidFill>
-                  <a:srgbClr val="CC0066"/>
+              <a:rPr sz="2000" b="0" i="0" dirty="0">
+                <a:solidFill>
+                  <a:srgbClr val="333333"/>
                 </a:solidFill>
                 <a:latin typeface="Calibri"/>
               </a:rPr>
-              <a:t>Morning: Recipe internals + the build pipeline</a:t>
-            </a:r>
-          </a:p>
-          <a:p>
-            <a:pPr>
-              <a:spcAft>
-                <a:spcPts val="400"/>
-              </a:spcAft>
-            </a:pPr>
-            <a:r>
-              <a:rPr sz="1300" b="0" i="0">
-                <a:solidFill>
-                  <a:srgbClr val="333333"/>
-                </a:solidFill>
-                <a:latin typeface="Calibri"/>
-              </a:rPr>
-              <a:t>• Recipe anatomy in depth — SRC_URI, do_install, FILES, RDEPENDS</a:t>
-            </a:r>
-          </a:p>
-          <a:p>
-            <a:pPr>
-              <a:spcAft>
-                <a:spcPts val="400"/>
-              </a:spcAft>
-            </a:pPr>
-            <a:r>
-              <a:rPr sz="1300" b="0" i="0">
-                <a:solidFill>
-                  <a:srgbClr val="333333"/>
-                </a:solidFill>
-                <a:latin typeface="Calibri"/>
-              </a:rPr>
-              <a:t>• Packaging models — rpm, deb, ipk — when each fits</a:t>
-            </a:r>
-          </a:p>
-          <a:p>
-            <a:pPr>
-              <a:spcAft>
-                <a:spcPts val="400"/>
-              </a:spcAft>
-            </a:pPr>
-            <a:r>
-              <a:rPr sz="1300" b="0" i="0">
-                <a:solidFill>
-                  <a:srgbClr val="333333"/>
-                </a:solidFill>
-                <a:latin typeface="Calibri"/>
-              </a:rPr>
-              <a:t>• IMAGE_FEATURES, packagegroups, image composition patterns</a:t>
-            </a:r>
-          </a:p>
-          <a:p>
-            <a:pPr>
-              <a:spcAft>
-                <a:spcPts val="1200"/>
-              </a:spcAft>
-            </a:pPr>
-            <a:r>
-              <a:rPr sz="1300" b="0" i="0">
-                <a:solidFill>
-                  <a:srgbClr val="333333"/>
-                </a:solidFill>
-                <a:latin typeface="Calibri"/>
-              </a:rPr>
-              <a:t>• BSP and hardware enablement (moved from Day 3 morning)</a:t>
+              <a:t>1.  What you accomplished today</a:t>
             </a:r>
           </a:p>
           <a:p>
@@ -5355,93 +5339,45 @@
               </a:spcAft>
             </a:pPr>
             <a:r>
-              <a:rPr sz="1600" b="1" i="0">
-                <a:solidFill>
-                  <a:srgbClr val="CC0066"/>
+              <a:rPr sz="2000" b="0" i="0" dirty="0">
+                <a:solidFill>
+                  <a:srgbClr val="333333"/>
                 </a:solidFill>
                 <a:latin typeface="Calibri"/>
               </a:rPr>
-              <a:t>Afternoon: Debugging + Performance</a:t>
+              <a:t>2.  Concept map — how today's pieces fit</a:t>
             </a:r>
           </a:p>
           <a:p>
             <a:pPr>
               <a:spcAft>
-                <a:spcPts val="400"/>
+                <a:spcPts val="600"/>
               </a:spcAft>
             </a:pPr>
             <a:r>
-              <a:rPr sz="1300" b="0" i="0">
+              <a:rPr sz="2000" b="0" i="0" dirty="0">
                 <a:solidFill>
                   <a:srgbClr val="333333"/>
                 </a:solidFill>
                 <a:latin typeface="Calibri"/>
               </a:rPr>
-              <a:t>• Where builds fail and how to diagnose each layer</a:t>
+              <a:t>3.  Day 2 preview</a:t>
             </a:r>
           </a:p>
           <a:p>
             <a:pPr>
               <a:spcAft>
-                <a:spcPts val="400"/>
+                <a:spcPts val="600"/>
               </a:spcAft>
             </a:pPr>
             <a:r>
-              <a:rPr sz="1300" b="0" i="0">
+              <a:rPr sz="2000" b="0" i="0" dirty="0">
                 <a:solidFill>
                   <a:srgbClr val="333333"/>
                 </a:solidFill>
                 <a:latin typeface="Calibri"/>
               </a:rPr>
-              <a:t>• Patch workflows for long-term maintainability</a:t>
-            </a:r>
-          </a:p>
-          <a:p>
-            <a:pPr>
-              <a:spcAft>
-                <a:spcPts val="400"/>
-              </a:spcAft>
-            </a:pPr>
-            <a:r>
-              <a:rPr sz="1300" b="0" i="0">
-                <a:solidFill>
-                  <a:srgbClr val="333333"/>
-                </a:solidFill>
-                <a:latin typeface="Calibri"/>
-              </a:rPr>
-              <a:t>• sstate strategy at scale — local vs shared mirrors</a:t>
-            </a:r>
-          </a:p>
-          <a:p>
-            <a:pPr>
-              <a:spcAft>
-                <a:spcPts val="400"/>
-              </a:spcAft>
-            </a:pPr>
-            <a:r>
-              <a:rPr sz="1300" b="0" i="0">
-                <a:solidFill>
-                  <a:srgbClr val="333333"/>
-                </a:solidFill>
-                <a:latin typeface="Calibri"/>
-              </a:rPr>
-              <a:t>• Parallelism tuning, hash equivalence</a:t>
-            </a:r>
-          </a:p>
-          <a:p>
-            <a:pPr>
-              <a:spcAft>
-                <a:spcPts val="400"/>
-              </a:spcAft>
-            </a:pPr>
-            <a:r>
-              <a:rPr sz="1300" b="0" i="0">
-                <a:solidFill>
-                  <a:srgbClr val="333333"/>
-                </a:solidFill>
-                <a:latin typeface="Calibri"/>
-              </a:rPr>
-              <a:t>• Hands-on lab applying all of it</a:t>
+              <a:t>4.  Tonight's optional reading</a:t>
             </a:r>
           </a:p>
         </p:txBody>
@@ -5454,8 +5390,8 @@
 </p:sld>
 </file>
 
-<file path=ppt/slides/slide11.xml><?xml version="1.0" encoding="utf-8"?>
-<p:sld xmlns:a="http://schemas.openxmlformats.org/drawingml/2006/main" xmlns:p="http://schemas.openxmlformats.org/presentationml/2006/main" xmlns:r="http://schemas.openxmlformats.org/officeDocument/2006/relationships">
+<file path=ppt/slides/slide3.xml><?xml version="1.0" encoding="utf-8"?>
+<p:sld xmlns:a="http://schemas.openxmlformats.org/drawingml/2006/main" xmlns:r="http://schemas.openxmlformats.org/officeDocument/2006/relationships" xmlns:p="http://schemas.openxmlformats.org/presentationml/2006/main">
   <p:cSld>
     <p:spTree>
       <p:nvGrpSpPr>
@@ -5463,7 +5399,14 @@
         <p:cNvGrpSpPr/>
         <p:nvPr/>
       </p:nvGrpSpPr>
-      <p:grpSpPr/>
+      <p:grpSpPr>
+        <a:xfrm>
+          <a:off x="0" y="0"/>
+          <a:ext cx="0" cy="0"/>
+          <a:chOff x="0" y="0"/>
+          <a:chExt cx="0" cy="0"/>
+        </a:xfrm>
+      </p:grpSpPr>
       <p:sp>
         <p:nvSpPr>
           <p:cNvPr id="2" name="Title 1"/>
@@ -5480,13 +5423,10 @@
           <a:lstStyle/>
           <a:p>
             <a:r>
-              <a:rPr sz="3200" b="1">
-                <a:solidFill>
-                  <a:srgbClr val="CC0066"/>
-                </a:solidFill>
+              <a:rPr sz="3200" b="1" dirty="0">
                 <a:latin typeface="Calibri"/>
               </a:rPr>
-              <a:t>Tonight's Optional Reading</a:t>
+              <a:t>Today's Accomplishments</a:t>
             </a:r>
           </a:p>
         </p:txBody>
@@ -5500,7 +5440,7 @@
         <p:spPr>
           <a:xfrm>
             <a:off x="822960" y="1417320"/>
-            <a:ext cx="10515600" cy="365760"/>
+            <a:ext cx="10515600" cy="338554"/>
           </a:xfrm>
           <a:prstGeom prst="rect">
             <a:avLst/>
@@ -5508,20 +5448,773 @@
           <a:noFill/>
         </p:spPr>
         <p:txBody>
-          <a:bodyPr wrap="square" anchor="t" lIns="45720" rIns="45720">
+          <a:bodyPr wrap="square" lIns="45720" rIns="45720" anchor="t">
             <a:spAutoFit/>
           </a:bodyPr>
           <a:lstStyle/>
           <a:p>
             <a:pPr algn="l"/>
             <a:r>
-              <a:rPr sz="1500" b="0" i="1">
+              <a:rPr sz="1600" b="0" i="1">
                 <a:solidFill>
                   <a:srgbClr val="666666"/>
                 </a:solidFill>
                 <a:latin typeface="Calibri"/>
               </a:rPr>
-              <a:t>If you want to deepen what we covered today.</a:t>
+              <a:t>What every participant should have done by now.</a:t>
+            </a:r>
+          </a:p>
+        </p:txBody>
+      </p:sp>
+      <p:sp>
+        <p:nvSpPr>
+          <p:cNvPr id="4" name="Rounded Rectangle 3"/>
+          <p:cNvSpPr/>
+          <p:nvPr/>
+        </p:nvSpPr>
+        <p:spPr>
+          <a:xfrm>
+            <a:off x="822960" y="1874519"/>
+            <a:ext cx="457200" cy="548640"/>
+          </a:xfrm>
+          <a:prstGeom prst="roundRect">
+            <a:avLst/>
+          </a:prstGeom>
+          <a:solidFill>
+            <a:srgbClr val="663399"/>
+          </a:solidFill>
+          <a:ln>
+            <a:noFill/>
+          </a:ln>
+          <a:effectLst/>
+        </p:spPr>
+        <p:style>
+          <a:lnRef idx="1">
+            <a:schemeClr val="accent1"/>
+          </a:lnRef>
+          <a:fillRef idx="3">
+            <a:schemeClr val="accent1"/>
+          </a:fillRef>
+          <a:effectRef idx="2">
+            <a:schemeClr val="accent1"/>
+          </a:effectRef>
+          <a:fontRef idx="minor">
+            <a:schemeClr val="lt1"/>
+          </a:fontRef>
+        </p:style>
+        <p:txBody>
+          <a:bodyPr lIns="0" rIns="0" rtlCol="0" anchor="ctr"/>
+          <a:lstStyle/>
+          <a:p>
+            <a:pPr algn="ctr"/>
+            <a:r>
+              <a:rPr sz="2200" b="1">
+                <a:solidFill>
+                  <a:srgbClr val="FFFFFF"/>
+                </a:solidFill>
+                <a:latin typeface="Calibri"/>
+              </a:rPr>
+              <a:t>1</a:t>
+            </a:r>
+          </a:p>
+        </p:txBody>
+      </p:sp>
+      <p:sp>
+        <p:nvSpPr>
+          <p:cNvPr id="5" name="TextBox 4"/>
+          <p:cNvSpPr txBox="1"/>
+          <p:nvPr/>
+        </p:nvSpPr>
+        <p:spPr>
+          <a:xfrm>
+            <a:off x="1417320" y="1874519"/>
+            <a:ext cx="10058400" cy="369332"/>
+          </a:xfrm>
+          <a:prstGeom prst="rect">
+            <a:avLst/>
+          </a:prstGeom>
+          <a:noFill/>
+        </p:spPr>
+        <p:txBody>
+          <a:bodyPr wrap="square" lIns="45720" rIns="45720" anchor="t">
+            <a:spAutoFit/>
+          </a:bodyPr>
+          <a:lstStyle/>
+          <a:p>
+            <a:pPr algn="l"/>
+            <a:r>
+              <a:rPr b="1" i="0" dirty="0">
+                <a:solidFill>
+                  <a:srgbClr val="CC0066"/>
+                </a:solidFill>
+                <a:latin typeface="Calibri"/>
+              </a:rPr>
+              <a:t>Linux fundamentals refreshed</a:t>
+            </a:r>
+          </a:p>
+        </p:txBody>
+      </p:sp>
+      <p:sp>
+        <p:nvSpPr>
+          <p:cNvPr id="6" name="TextBox 5"/>
+          <p:cNvSpPr txBox="1"/>
+          <p:nvPr/>
+        </p:nvSpPr>
+        <p:spPr>
+          <a:xfrm>
+            <a:off x="1417320" y="2185415"/>
+            <a:ext cx="10058400" cy="369332"/>
+          </a:xfrm>
+          <a:prstGeom prst="rect">
+            <a:avLst/>
+          </a:prstGeom>
+          <a:noFill/>
+        </p:spPr>
+        <p:txBody>
+          <a:bodyPr wrap="square" lIns="45720" rIns="45720" anchor="t">
+            <a:spAutoFit/>
+          </a:bodyPr>
+          <a:lstStyle/>
+          <a:p>
+            <a:pPr algn="l"/>
+            <a:r>
+              <a:rPr b="0" i="0" dirty="0">
+                <a:solidFill>
+                  <a:srgbClr val="333333"/>
+                </a:solidFill>
+                <a:latin typeface="Calibri"/>
+              </a:rPr>
+              <a:t>Filesystem, processes, </a:t>
+            </a:r>
+            <a:r>
+              <a:rPr b="0" i="0" dirty="0" err="1">
+                <a:solidFill>
+                  <a:srgbClr val="333333"/>
+                </a:solidFill>
+                <a:latin typeface="Calibri"/>
+              </a:rPr>
+              <a:t>systemd</a:t>
+            </a:r>
+            <a:r>
+              <a:rPr b="0" i="0" dirty="0">
+                <a:solidFill>
+                  <a:srgbClr val="333333"/>
+                </a:solidFill>
+                <a:latin typeface="Calibri"/>
+              </a:rPr>
+              <a:t>, networking, troubleshooting</a:t>
+            </a:r>
+          </a:p>
+        </p:txBody>
+      </p:sp>
+      <p:sp>
+        <p:nvSpPr>
+          <p:cNvPr id="7" name="Rounded Rectangle 6"/>
+          <p:cNvSpPr/>
+          <p:nvPr/>
+        </p:nvSpPr>
+        <p:spPr>
+          <a:xfrm>
+            <a:off x="822960" y="2587752"/>
+            <a:ext cx="457200" cy="548640"/>
+          </a:xfrm>
+          <a:prstGeom prst="roundRect">
+            <a:avLst/>
+          </a:prstGeom>
+          <a:solidFill>
+            <a:srgbClr val="663399"/>
+          </a:solidFill>
+          <a:ln>
+            <a:noFill/>
+          </a:ln>
+          <a:effectLst/>
+        </p:spPr>
+        <p:style>
+          <a:lnRef idx="1">
+            <a:schemeClr val="accent1"/>
+          </a:lnRef>
+          <a:fillRef idx="3">
+            <a:schemeClr val="accent1"/>
+          </a:fillRef>
+          <a:effectRef idx="2">
+            <a:schemeClr val="accent1"/>
+          </a:effectRef>
+          <a:fontRef idx="minor">
+            <a:schemeClr val="lt1"/>
+          </a:fontRef>
+        </p:style>
+        <p:txBody>
+          <a:bodyPr lIns="0" rIns="0" rtlCol="0" anchor="ctr"/>
+          <a:lstStyle/>
+          <a:p>
+            <a:pPr algn="ctr"/>
+            <a:r>
+              <a:rPr sz="2200" b="1">
+                <a:solidFill>
+                  <a:srgbClr val="FFFFFF"/>
+                </a:solidFill>
+                <a:latin typeface="Calibri"/>
+              </a:rPr>
+              <a:t>2</a:t>
+            </a:r>
+          </a:p>
+        </p:txBody>
+      </p:sp>
+      <p:sp>
+        <p:nvSpPr>
+          <p:cNvPr id="8" name="TextBox 7"/>
+          <p:cNvSpPr txBox="1"/>
+          <p:nvPr/>
+        </p:nvSpPr>
+        <p:spPr>
+          <a:xfrm>
+            <a:off x="1417320" y="2587752"/>
+            <a:ext cx="10058400" cy="369332"/>
+          </a:xfrm>
+          <a:prstGeom prst="rect">
+            <a:avLst/>
+          </a:prstGeom>
+          <a:noFill/>
+        </p:spPr>
+        <p:txBody>
+          <a:bodyPr wrap="square" lIns="45720" rIns="45720" anchor="t">
+            <a:spAutoFit/>
+          </a:bodyPr>
+          <a:lstStyle/>
+          <a:p>
+            <a:pPr algn="l"/>
+            <a:r>
+              <a:rPr b="1" i="0">
+                <a:solidFill>
+                  <a:srgbClr val="CC0066"/>
+                </a:solidFill>
+                <a:latin typeface="Calibri"/>
+              </a:rPr>
+              <a:t>Yocto's place in the landscape clarified</a:t>
+            </a:r>
+          </a:p>
+        </p:txBody>
+      </p:sp>
+      <p:sp>
+        <p:nvSpPr>
+          <p:cNvPr id="9" name="TextBox 8"/>
+          <p:cNvSpPr txBox="1"/>
+          <p:nvPr/>
+        </p:nvSpPr>
+        <p:spPr>
+          <a:xfrm>
+            <a:off x="1417320" y="2898648"/>
+            <a:ext cx="10058400" cy="369332"/>
+          </a:xfrm>
+          <a:prstGeom prst="rect">
+            <a:avLst/>
+          </a:prstGeom>
+          <a:noFill/>
+        </p:spPr>
+        <p:txBody>
+          <a:bodyPr wrap="square" lIns="45720" rIns="45720" anchor="t">
+            <a:spAutoFit/>
+          </a:bodyPr>
+          <a:lstStyle/>
+          <a:p>
+            <a:pPr algn="l"/>
+            <a:r>
+              <a:rPr b="0" i="0">
+                <a:solidFill>
+                  <a:srgbClr val="333333"/>
+                </a:solidFill>
+                <a:latin typeface="Calibri"/>
+              </a:rPr>
+              <a:t>Buildroot vs Yocto, cross-compile fundamentals, target triples</a:t>
+            </a:r>
+          </a:p>
+        </p:txBody>
+      </p:sp>
+      <p:sp>
+        <p:nvSpPr>
+          <p:cNvPr id="10" name="Rounded Rectangle 9"/>
+          <p:cNvSpPr/>
+          <p:nvPr/>
+        </p:nvSpPr>
+        <p:spPr>
+          <a:xfrm>
+            <a:off x="822960" y="3300984"/>
+            <a:ext cx="457200" cy="548640"/>
+          </a:xfrm>
+          <a:prstGeom prst="roundRect">
+            <a:avLst/>
+          </a:prstGeom>
+          <a:solidFill>
+            <a:srgbClr val="663399"/>
+          </a:solidFill>
+          <a:ln>
+            <a:noFill/>
+          </a:ln>
+          <a:effectLst/>
+        </p:spPr>
+        <p:style>
+          <a:lnRef idx="1">
+            <a:schemeClr val="accent1"/>
+          </a:lnRef>
+          <a:fillRef idx="3">
+            <a:schemeClr val="accent1"/>
+          </a:fillRef>
+          <a:effectRef idx="2">
+            <a:schemeClr val="accent1"/>
+          </a:effectRef>
+          <a:fontRef idx="minor">
+            <a:schemeClr val="lt1"/>
+          </a:fontRef>
+        </p:style>
+        <p:txBody>
+          <a:bodyPr lIns="0" rIns="0" rtlCol="0" anchor="ctr"/>
+          <a:lstStyle/>
+          <a:p>
+            <a:pPr algn="ctr"/>
+            <a:r>
+              <a:rPr sz="2200" b="1">
+                <a:solidFill>
+                  <a:srgbClr val="FFFFFF"/>
+                </a:solidFill>
+                <a:latin typeface="Calibri"/>
+              </a:rPr>
+              <a:t>3</a:t>
+            </a:r>
+          </a:p>
+        </p:txBody>
+      </p:sp>
+      <p:sp>
+        <p:nvSpPr>
+          <p:cNvPr id="11" name="TextBox 10"/>
+          <p:cNvSpPr txBox="1"/>
+          <p:nvPr/>
+        </p:nvSpPr>
+        <p:spPr>
+          <a:xfrm>
+            <a:off x="1417320" y="3300984"/>
+            <a:ext cx="10058400" cy="369332"/>
+          </a:xfrm>
+          <a:prstGeom prst="rect">
+            <a:avLst/>
+          </a:prstGeom>
+          <a:noFill/>
+        </p:spPr>
+        <p:txBody>
+          <a:bodyPr wrap="square" lIns="45720" rIns="45720" anchor="t">
+            <a:spAutoFit/>
+          </a:bodyPr>
+          <a:lstStyle/>
+          <a:p>
+            <a:pPr algn="l"/>
+            <a:r>
+              <a:rPr b="1" i="0">
+                <a:solidFill>
+                  <a:srgbClr val="CC0066"/>
+                </a:solidFill>
+                <a:latin typeface="Calibri"/>
+              </a:rPr>
+              <a:t>Mental model of Yocto built</a:t>
+            </a:r>
+          </a:p>
+        </p:txBody>
+      </p:sp>
+      <p:sp>
+        <p:nvSpPr>
+          <p:cNvPr id="12" name="TextBox 11"/>
+          <p:cNvSpPr txBox="1"/>
+          <p:nvPr/>
+        </p:nvSpPr>
+        <p:spPr>
+          <a:xfrm>
+            <a:off x="1417320" y="3611879"/>
+            <a:ext cx="10058400" cy="369332"/>
+          </a:xfrm>
+          <a:prstGeom prst="rect">
+            <a:avLst/>
+          </a:prstGeom>
+          <a:noFill/>
+        </p:spPr>
+        <p:txBody>
+          <a:bodyPr wrap="square" lIns="45720" rIns="45720" anchor="t">
+            <a:spAutoFit/>
+          </a:bodyPr>
+          <a:lstStyle/>
+          <a:p>
+            <a:pPr algn="l"/>
+            <a:r>
+              <a:rPr b="0" i="0" dirty="0">
+                <a:solidFill>
+                  <a:srgbClr val="333333"/>
+                </a:solidFill>
+                <a:latin typeface="Calibri"/>
+              </a:rPr>
+              <a:t>Poky, OE-Core, </a:t>
+            </a:r>
+            <a:r>
+              <a:rPr b="0" i="0" dirty="0" err="1">
+                <a:solidFill>
+                  <a:srgbClr val="333333"/>
+                </a:solidFill>
+                <a:latin typeface="Calibri"/>
+              </a:rPr>
+              <a:t>BitBake</a:t>
+            </a:r>
+            <a:r>
+              <a:rPr b="0" i="0" dirty="0">
+                <a:solidFill>
+                  <a:srgbClr val="333333"/>
+                </a:solidFill>
+                <a:latin typeface="Calibri"/>
+              </a:rPr>
+              <a:t>, layers, recipes, tasks, </a:t>
+            </a:r>
+            <a:r>
+              <a:rPr b="0" i="0" dirty="0" err="1">
+                <a:solidFill>
+                  <a:srgbClr val="333333"/>
+                </a:solidFill>
+                <a:latin typeface="Calibri"/>
+              </a:rPr>
+              <a:t>sstate</a:t>
+            </a:r>
+            <a:r>
+              <a:rPr b="0" i="0" dirty="0">
+                <a:solidFill>
+                  <a:srgbClr val="333333"/>
+                </a:solidFill>
+                <a:latin typeface="Calibri"/>
+              </a:rPr>
+              <a:t>, MACHINE/DISTRO/IMAGE</a:t>
+            </a:r>
+          </a:p>
+        </p:txBody>
+      </p:sp>
+      <p:sp>
+        <p:nvSpPr>
+          <p:cNvPr id="13" name="Rounded Rectangle 12"/>
+          <p:cNvSpPr/>
+          <p:nvPr/>
+        </p:nvSpPr>
+        <p:spPr>
+          <a:xfrm>
+            <a:off x="822960" y="4014215"/>
+            <a:ext cx="457200" cy="548640"/>
+          </a:xfrm>
+          <a:prstGeom prst="roundRect">
+            <a:avLst/>
+          </a:prstGeom>
+          <a:solidFill>
+            <a:srgbClr val="663399"/>
+          </a:solidFill>
+          <a:ln>
+            <a:noFill/>
+          </a:ln>
+          <a:effectLst/>
+        </p:spPr>
+        <p:style>
+          <a:lnRef idx="1">
+            <a:schemeClr val="accent1"/>
+          </a:lnRef>
+          <a:fillRef idx="3">
+            <a:schemeClr val="accent1"/>
+          </a:fillRef>
+          <a:effectRef idx="2">
+            <a:schemeClr val="accent1"/>
+          </a:effectRef>
+          <a:fontRef idx="minor">
+            <a:schemeClr val="lt1"/>
+          </a:fontRef>
+        </p:style>
+        <p:txBody>
+          <a:bodyPr lIns="0" rIns="0" rtlCol="0" anchor="ctr"/>
+          <a:lstStyle/>
+          <a:p>
+            <a:pPr algn="ctr"/>
+            <a:r>
+              <a:rPr sz="2200" b="1">
+                <a:solidFill>
+                  <a:srgbClr val="FFFFFF"/>
+                </a:solidFill>
+                <a:latin typeface="Calibri"/>
+              </a:rPr>
+              <a:t>4</a:t>
+            </a:r>
+          </a:p>
+        </p:txBody>
+      </p:sp>
+      <p:sp>
+        <p:nvSpPr>
+          <p:cNvPr id="14" name="TextBox 13"/>
+          <p:cNvSpPr txBox="1"/>
+          <p:nvPr/>
+        </p:nvSpPr>
+        <p:spPr>
+          <a:xfrm>
+            <a:off x="1417320" y="4014215"/>
+            <a:ext cx="10058400" cy="369332"/>
+          </a:xfrm>
+          <a:prstGeom prst="rect">
+            <a:avLst/>
+          </a:prstGeom>
+          <a:noFill/>
+        </p:spPr>
+        <p:txBody>
+          <a:bodyPr wrap="square" lIns="45720" rIns="45720" anchor="t">
+            <a:spAutoFit/>
+          </a:bodyPr>
+          <a:lstStyle/>
+          <a:p>
+            <a:pPr algn="l"/>
+            <a:r>
+              <a:rPr b="1" i="0">
+                <a:solidFill>
+                  <a:srgbClr val="CC0066"/>
+                </a:solidFill>
+                <a:latin typeface="Calibri"/>
+              </a:rPr>
+              <a:t>BitBake internals understood at usage depth</a:t>
+            </a:r>
+          </a:p>
+        </p:txBody>
+      </p:sp>
+      <p:sp>
+        <p:nvSpPr>
+          <p:cNvPr id="15" name="TextBox 14"/>
+          <p:cNvSpPr txBox="1"/>
+          <p:nvPr/>
+        </p:nvSpPr>
+        <p:spPr>
+          <a:xfrm>
+            <a:off x="1417320" y="4325112"/>
+            <a:ext cx="10058400" cy="369332"/>
+          </a:xfrm>
+          <a:prstGeom prst="rect">
+            <a:avLst/>
+          </a:prstGeom>
+          <a:noFill/>
+        </p:spPr>
+        <p:txBody>
+          <a:bodyPr wrap="square" lIns="45720" rIns="45720" anchor="t">
+            <a:spAutoFit/>
+          </a:bodyPr>
+          <a:lstStyle/>
+          <a:p>
+            <a:pPr algn="l"/>
+            <a:r>
+              <a:rPr b="0" i="0">
+                <a:solidFill>
+                  <a:srgbClr val="333333"/>
+                </a:solidFill>
+                <a:latin typeface="Calibri"/>
+              </a:rPr>
+              <a:t>Parse-plan-execute, variable operators, overrides, config files</a:t>
+            </a:r>
+          </a:p>
+        </p:txBody>
+      </p:sp>
+      <p:sp>
+        <p:nvSpPr>
+          <p:cNvPr id="16" name="Rounded Rectangle 15"/>
+          <p:cNvSpPr/>
+          <p:nvPr/>
+        </p:nvSpPr>
+        <p:spPr>
+          <a:xfrm>
+            <a:off x="822960" y="4727448"/>
+            <a:ext cx="457200" cy="548640"/>
+          </a:xfrm>
+          <a:prstGeom prst="roundRect">
+            <a:avLst/>
+          </a:prstGeom>
+          <a:solidFill>
+            <a:srgbClr val="663399"/>
+          </a:solidFill>
+          <a:ln>
+            <a:noFill/>
+          </a:ln>
+          <a:effectLst/>
+        </p:spPr>
+        <p:style>
+          <a:lnRef idx="1">
+            <a:schemeClr val="accent1"/>
+          </a:lnRef>
+          <a:fillRef idx="3">
+            <a:schemeClr val="accent1"/>
+          </a:fillRef>
+          <a:effectRef idx="2">
+            <a:schemeClr val="accent1"/>
+          </a:effectRef>
+          <a:fontRef idx="minor">
+            <a:schemeClr val="lt1"/>
+          </a:fontRef>
+        </p:style>
+        <p:txBody>
+          <a:bodyPr lIns="0" rIns="0" rtlCol="0" anchor="ctr"/>
+          <a:lstStyle/>
+          <a:p>
+            <a:pPr algn="ctr"/>
+            <a:r>
+              <a:rPr sz="2200" b="1">
+                <a:solidFill>
+                  <a:srgbClr val="FFFFFF"/>
+                </a:solidFill>
+                <a:latin typeface="Calibri"/>
+              </a:rPr>
+              <a:t>5</a:t>
+            </a:r>
+          </a:p>
+        </p:txBody>
+      </p:sp>
+      <p:sp>
+        <p:nvSpPr>
+          <p:cNvPr id="17" name="TextBox 16"/>
+          <p:cNvSpPr txBox="1"/>
+          <p:nvPr/>
+        </p:nvSpPr>
+        <p:spPr>
+          <a:xfrm>
+            <a:off x="1417320" y="4727448"/>
+            <a:ext cx="10058400" cy="369332"/>
+          </a:xfrm>
+          <a:prstGeom prst="rect">
+            <a:avLst/>
+          </a:prstGeom>
+          <a:noFill/>
+        </p:spPr>
+        <p:txBody>
+          <a:bodyPr wrap="square" lIns="45720" rIns="45720" anchor="t">
+            <a:spAutoFit/>
+          </a:bodyPr>
+          <a:lstStyle/>
+          <a:p>
+            <a:pPr algn="l"/>
+            <a:r>
+              <a:rPr b="1" i="0">
+                <a:solidFill>
+                  <a:srgbClr val="CC0066"/>
+                </a:solidFill>
+                <a:latin typeface="Calibri"/>
+              </a:rPr>
+              <a:t>First custom Yocto image built and booted</a:t>
+            </a:r>
+          </a:p>
+        </p:txBody>
+      </p:sp>
+      <p:sp>
+        <p:nvSpPr>
+          <p:cNvPr id="18" name="TextBox 17"/>
+          <p:cNvSpPr txBox="1"/>
+          <p:nvPr/>
+        </p:nvSpPr>
+        <p:spPr>
+          <a:xfrm>
+            <a:off x="1417320" y="5038344"/>
+            <a:ext cx="10058400" cy="369332"/>
+          </a:xfrm>
+          <a:prstGeom prst="rect">
+            <a:avLst/>
+          </a:prstGeom>
+          <a:noFill/>
+        </p:spPr>
+        <p:txBody>
+          <a:bodyPr wrap="square" lIns="45720" rIns="45720" anchor="t">
+            <a:spAutoFit/>
+          </a:bodyPr>
+          <a:lstStyle/>
+          <a:p>
+            <a:pPr algn="l"/>
+            <a:r>
+              <a:rPr b="0" i="0">
+                <a:solidFill>
+                  <a:srgbClr val="333333"/>
+                </a:solidFill>
+                <a:latin typeface="Calibri"/>
+              </a:rPr>
+              <a:t>meta-trainerdemo, hello-trainergw, IMAGE_INSTALL — pattern memorized</a:t>
+            </a:r>
+          </a:p>
+        </p:txBody>
+      </p:sp>
+    </p:spTree>
+  </p:cSld>
+  <p:clrMapOvr>
+    <a:masterClrMapping/>
+  </p:clrMapOvr>
+</p:sld>
+</file>
+
+<file path=ppt/slides/slide4.xml><?xml version="1.0" encoding="utf-8"?>
+<p:sld xmlns:a="http://schemas.openxmlformats.org/drawingml/2006/main" xmlns:r="http://schemas.openxmlformats.org/officeDocument/2006/relationships" xmlns:p="http://schemas.openxmlformats.org/presentationml/2006/main">
+  <p:cSld>
+    <p:spTree>
+      <p:nvGrpSpPr>
+        <p:cNvPr id="1" name=""/>
+        <p:cNvGrpSpPr/>
+        <p:nvPr/>
+      </p:nvGrpSpPr>
+      <p:grpSpPr>
+        <a:xfrm>
+          <a:off x="0" y="0"/>
+          <a:ext cx="0" cy="0"/>
+          <a:chOff x="0" y="0"/>
+          <a:chExt cx="0" cy="0"/>
+        </a:xfrm>
+      </p:grpSpPr>
+      <p:sp>
+        <p:nvSpPr>
+          <p:cNvPr id="2" name="Title 1"/>
+          <p:cNvSpPr>
+            <a:spLocks noGrp="1"/>
+          </p:cNvSpPr>
+          <p:nvPr>
+            <p:ph type="title"/>
+          </p:nvPr>
+        </p:nvSpPr>
+        <p:spPr/>
+        <p:txBody>
+          <a:bodyPr/>
+          <a:lstStyle/>
+          <a:p>
+            <a:r>
+              <a:rPr sz="3200" b="1" dirty="0">
+                <a:latin typeface="Calibri"/>
+              </a:rPr>
+              <a:t>Day 2 Preview</a:t>
+            </a:r>
+          </a:p>
+        </p:txBody>
+      </p:sp>
+      <p:sp>
+        <p:nvSpPr>
+          <p:cNvPr id="3" name="TextBox 2"/>
+          <p:cNvSpPr txBox="1"/>
+          <p:nvPr/>
+        </p:nvSpPr>
+        <p:spPr>
+          <a:xfrm>
+            <a:off x="822960" y="1417320"/>
+            <a:ext cx="10515600" cy="338554"/>
+          </a:xfrm>
+          <a:prstGeom prst="rect">
+            <a:avLst/>
+          </a:prstGeom>
+          <a:noFill/>
+        </p:spPr>
+        <p:txBody>
+          <a:bodyPr wrap="square" lIns="45720" rIns="45720" anchor="t">
+            <a:spAutoFit/>
+          </a:bodyPr>
+          <a:lstStyle/>
+          <a:p>
+            <a:pPr algn="l"/>
+            <a:r>
+              <a:rPr sz="1600" b="0" i="1" dirty="0">
+                <a:solidFill>
+                  <a:srgbClr val="666666"/>
+                </a:solidFill>
+                <a:latin typeface="Calibri"/>
+              </a:rPr>
+              <a:t>What we'll cover tomorrow.</a:t>
             </a:r>
           </a:p>
         </p:txBody>
@@ -5535,7 +6228,7 @@
         <p:spPr>
           <a:xfrm>
             <a:off x="822960" y="1783080"/>
-            <a:ext cx="10515600" cy="4114800"/>
+            <a:ext cx="10515600" cy="3590727"/>
           </a:xfrm>
           <a:prstGeom prst="rect">
             <a:avLst/>
@@ -5550,17 +6243,381 @@
           <a:p>
             <a:pPr>
               <a:spcAft>
+                <a:spcPts val="600"/>
+              </a:spcAft>
+            </a:pPr>
+            <a:r>
+              <a:rPr sz="2000" b="1" i="0" dirty="0">
+                <a:solidFill>
+                  <a:srgbClr val="CC0066"/>
+                </a:solidFill>
+                <a:latin typeface="Calibri"/>
+              </a:rPr>
+              <a:t>Morning: Recipe internals + the build pipeline</a:t>
+            </a:r>
+          </a:p>
+          <a:p>
+            <a:pPr>
+              <a:spcAft>
                 <a:spcPts val="400"/>
               </a:spcAft>
             </a:pPr>
             <a:r>
-              <a:rPr sz="1400" b="1" i="0">
-                <a:solidFill>
-                  <a:srgbClr val="CC0066"/>
+              <a:rPr sz="1600" b="0" i="0" dirty="0">
+                <a:solidFill>
+                  <a:srgbClr val="333333"/>
                 </a:solidFill>
                 <a:latin typeface="Calibri"/>
               </a:rPr>
-              <a:t>Yocto Project Overview Manual</a:t>
+              <a:t>• Recipe anatomy in depth — SRC_URI, </a:t>
+            </a:r>
+            <a:r>
+              <a:rPr sz="1600" b="0" i="0" dirty="0" err="1">
+                <a:solidFill>
+                  <a:srgbClr val="333333"/>
+                </a:solidFill>
+                <a:latin typeface="Calibri"/>
+              </a:rPr>
+              <a:t>do_install</a:t>
+            </a:r>
+            <a:r>
+              <a:rPr sz="1600" b="0" i="0" dirty="0">
+                <a:solidFill>
+                  <a:srgbClr val="333333"/>
+                </a:solidFill>
+                <a:latin typeface="Calibri"/>
+              </a:rPr>
+              <a:t>, FILES, RDEPENDS</a:t>
+            </a:r>
+          </a:p>
+          <a:p>
+            <a:pPr>
+              <a:spcAft>
+                <a:spcPts val="400"/>
+              </a:spcAft>
+            </a:pPr>
+            <a:r>
+              <a:rPr sz="1600" b="0" i="0" dirty="0">
+                <a:solidFill>
+                  <a:srgbClr val="333333"/>
+                </a:solidFill>
+                <a:latin typeface="Calibri"/>
+              </a:rPr>
+              <a:t>• Packaging models — rpm, deb, </a:t>
+            </a:r>
+            <a:r>
+              <a:rPr sz="1600" b="0" i="0" dirty="0" err="1">
+                <a:solidFill>
+                  <a:srgbClr val="333333"/>
+                </a:solidFill>
+                <a:latin typeface="Calibri"/>
+              </a:rPr>
+              <a:t>ipk</a:t>
+            </a:r>
+            <a:r>
+              <a:rPr sz="1600" b="0" i="0" dirty="0">
+                <a:solidFill>
+                  <a:srgbClr val="333333"/>
+                </a:solidFill>
+                <a:latin typeface="Calibri"/>
+              </a:rPr>
+              <a:t> — when each fits</a:t>
+            </a:r>
+          </a:p>
+          <a:p>
+            <a:pPr>
+              <a:spcAft>
+                <a:spcPts val="400"/>
+              </a:spcAft>
+            </a:pPr>
+            <a:r>
+              <a:rPr sz="1600" b="0" i="0" dirty="0">
+                <a:solidFill>
+                  <a:srgbClr val="333333"/>
+                </a:solidFill>
+                <a:latin typeface="Calibri"/>
+              </a:rPr>
+              <a:t>• IMAGE_FEATURES, </a:t>
+            </a:r>
+            <a:r>
+              <a:rPr sz="1600" b="0" i="0" dirty="0" err="1">
+                <a:solidFill>
+                  <a:srgbClr val="333333"/>
+                </a:solidFill>
+                <a:latin typeface="Calibri"/>
+              </a:rPr>
+              <a:t>packagegroups</a:t>
+            </a:r>
+            <a:r>
+              <a:rPr sz="1600" b="0" i="0" dirty="0">
+                <a:solidFill>
+                  <a:srgbClr val="333333"/>
+                </a:solidFill>
+                <a:latin typeface="Calibri"/>
+              </a:rPr>
+              <a:t>, image composition patterns</a:t>
+            </a:r>
+          </a:p>
+          <a:p>
+            <a:pPr>
+              <a:spcAft>
+                <a:spcPts val="1200"/>
+              </a:spcAft>
+            </a:pPr>
+            <a:r>
+              <a:rPr sz="1600" b="0" i="0" dirty="0">
+                <a:solidFill>
+                  <a:srgbClr val="333333"/>
+                </a:solidFill>
+                <a:latin typeface="Calibri"/>
+              </a:rPr>
+              <a:t>• BSP and hardware enablement (moved from Day 3 morning)</a:t>
+            </a:r>
+          </a:p>
+          <a:p>
+            <a:pPr>
+              <a:spcAft>
+                <a:spcPts val="600"/>
+              </a:spcAft>
+            </a:pPr>
+            <a:r>
+              <a:rPr sz="2000" b="1" i="0" dirty="0">
+                <a:solidFill>
+                  <a:srgbClr val="CC0066"/>
+                </a:solidFill>
+                <a:latin typeface="Calibri"/>
+              </a:rPr>
+              <a:t>Afternoon: Debugging + Performance</a:t>
+            </a:r>
+          </a:p>
+          <a:p>
+            <a:pPr>
+              <a:spcAft>
+                <a:spcPts val="400"/>
+              </a:spcAft>
+            </a:pPr>
+            <a:r>
+              <a:rPr sz="1600" b="0" i="0" dirty="0">
+                <a:solidFill>
+                  <a:srgbClr val="333333"/>
+                </a:solidFill>
+                <a:latin typeface="Calibri"/>
+              </a:rPr>
+              <a:t>• Where builds fail and how to diagnose each layer</a:t>
+            </a:r>
+          </a:p>
+          <a:p>
+            <a:pPr>
+              <a:spcAft>
+                <a:spcPts val="400"/>
+              </a:spcAft>
+            </a:pPr>
+            <a:r>
+              <a:rPr sz="1600" b="0" i="0" dirty="0">
+                <a:solidFill>
+                  <a:srgbClr val="333333"/>
+                </a:solidFill>
+                <a:latin typeface="Calibri"/>
+              </a:rPr>
+              <a:t>• Patch workflows for long-term maintainability</a:t>
+            </a:r>
+          </a:p>
+          <a:p>
+            <a:pPr>
+              <a:spcAft>
+                <a:spcPts val="400"/>
+              </a:spcAft>
+            </a:pPr>
+            <a:r>
+              <a:rPr sz="1600" b="0" i="0" dirty="0">
+                <a:solidFill>
+                  <a:srgbClr val="333333"/>
+                </a:solidFill>
+                <a:latin typeface="Calibri"/>
+              </a:rPr>
+              <a:t>• </a:t>
+            </a:r>
+            <a:r>
+              <a:rPr sz="1600" b="0" i="0" dirty="0" err="1">
+                <a:solidFill>
+                  <a:srgbClr val="333333"/>
+                </a:solidFill>
+                <a:latin typeface="Calibri"/>
+              </a:rPr>
+              <a:t>sstate</a:t>
+            </a:r>
+            <a:r>
+              <a:rPr sz="1600" b="0" i="0" dirty="0">
+                <a:solidFill>
+                  <a:srgbClr val="333333"/>
+                </a:solidFill>
+                <a:latin typeface="Calibri"/>
+              </a:rPr>
+              <a:t> strategy at scale — local vs shared mirrors</a:t>
+            </a:r>
+          </a:p>
+          <a:p>
+            <a:pPr>
+              <a:spcAft>
+                <a:spcPts val="400"/>
+              </a:spcAft>
+            </a:pPr>
+            <a:r>
+              <a:rPr sz="1600" b="0" i="0" dirty="0">
+                <a:solidFill>
+                  <a:srgbClr val="333333"/>
+                </a:solidFill>
+                <a:latin typeface="Calibri"/>
+              </a:rPr>
+              <a:t>• Parallelism tuning, hash equivalence</a:t>
+            </a:r>
+          </a:p>
+          <a:p>
+            <a:pPr>
+              <a:spcAft>
+                <a:spcPts val="400"/>
+              </a:spcAft>
+            </a:pPr>
+            <a:r>
+              <a:rPr sz="1600" b="0" i="0" dirty="0">
+                <a:solidFill>
+                  <a:srgbClr val="333333"/>
+                </a:solidFill>
+                <a:latin typeface="Calibri"/>
+              </a:rPr>
+              <a:t>• Hands-on lab applying all of it</a:t>
+            </a:r>
+          </a:p>
+        </p:txBody>
+      </p:sp>
+    </p:spTree>
+  </p:cSld>
+  <p:clrMapOvr>
+    <a:masterClrMapping/>
+  </p:clrMapOvr>
+</p:sld>
+</file>
+
+<file path=ppt/slides/slide5.xml><?xml version="1.0" encoding="utf-8"?>
+<p:sld xmlns:a="http://schemas.openxmlformats.org/drawingml/2006/main" xmlns:r="http://schemas.openxmlformats.org/officeDocument/2006/relationships" xmlns:p="http://schemas.openxmlformats.org/presentationml/2006/main">
+  <p:cSld>
+    <p:spTree>
+      <p:nvGrpSpPr>
+        <p:cNvPr id="1" name=""/>
+        <p:cNvGrpSpPr/>
+        <p:nvPr/>
+      </p:nvGrpSpPr>
+      <p:grpSpPr>
+        <a:xfrm>
+          <a:off x="0" y="0"/>
+          <a:ext cx="0" cy="0"/>
+          <a:chOff x="0" y="0"/>
+          <a:chExt cx="0" cy="0"/>
+        </a:xfrm>
+      </p:grpSpPr>
+      <p:sp>
+        <p:nvSpPr>
+          <p:cNvPr id="2" name="Title 1"/>
+          <p:cNvSpPr>
+            <a:spLocks noGrp="1"/>
+          </p:cNvSpPr>
+          <p:nvPr>
+            <p:ph type="title"/>
+          </p:nvPr>
+        </p:nvSpPr>
+        <p:spPr/>
+        <p:txBody>
+          <a:bodyPr/>
+          <a:lstStyle/>
+          <a:p>
+            <a:r>
+              <a:rPr sz="3200" b="1" dirty="0">
+                <a:latin typeface="Calibri"/>
+              </a:rPr>
+              <a:t>Tonight's Optional Reading</a:t>
+            </a:r>
+          </a:p>
+        </p:txBody>
+      </p:sp>
+      <p:sp>
+        <p:nvSpPr>
+          <p:cNvPr id="3" name="TextBox 2"/>
+          <p:cNvSpPr txBox="1"/>
+          <p:nvPr/>
+        </p:nvSpPr>
+        <p:spPr>
+          <a:xfrm>
+            <a:off x="822960" y="1417320"/>
+            <a:ext cx="10515600" cy="338554"/>
+          </a:xfrm>
+          <a:prstGeom prst="rect">
+            <a:avLst/>
+          </a:prstGeom>
+          <a:noFill/>
+        </p:spPr>
+        <p:txBody>
+          <a:bodyPr wrap="square" lIns="45720" rIns="45720" anchor="t">
+            <a:spAutoFit/>
+          </a:bodyPr>
+          <a:lstStyle/>
+          <a:p>
+            <a:pPr algn="l"/>
+            <a:r>
+              <a:rPr sz="1600" b="0" i="1" dirty="0">
+                <a:solidFill>
+                  <a:srgbClr val="666666"/>
+                </a:solidFill>
+                <a:latin typeface="Calibri"/>
+              </a:rPr>
+              <a:t>If you want to deepen what we covered today.</a:t>
+            </a:r>
+          </a:p>
+        </p:txBody>
+      </p:sp>
+      <p:sp>
+        <p:nvSpPr>
+          <p:cNvPr id="4" name="TextBox 3"/>
+          <p:cNvSpPr txBox="1"/>
+          <p:nvPr/>
+        </p:nvSpPr>
+        <p:spPr>
+          <a:xfrm>
+            <a:off x="822960" y="1783080"/>
+            <a:ext cx="10515600" cy="2446824"/>
+          </a:xfrm>
+          <a:prstGeom prst="rect">
+            <a:avLst/>
+          </a:prstGeom>
+          <a:noFill/>
+        </p:spPr>
+        <p:txBody>
+          <a:bodyPr wrap="square" lIns="45720" rIns="45720">
+            <a:spAutoFit/>
+          </a:bodyPr>
+          <a:lstStyle/>
+          <a:p>
+            <a:pPr>
+              <a:spcAft>
+                <a:spcPts val="400"/>
+              </a:spcAft>
+            </a:pPr>
+            <a:r>
+              <a:rPr b="1" i="0" dirty="0" err="1">
+                <a:solidFill>
+                  <a:srgbClr val="CC0066"/>
+                </a:solidFill>
+                <a:latin typeface="Calibri"/>
+              </a:rPr>
+              <a:t>Yocto</a:t>
+            </a:r>
+            <a:r>
+              <a:rPr b="1" i="0" dirty="0">
+                <a:solidFill>
+                  <a:srgbClr val="CC0066"/>
+                </a:solidFill>
+                <a:latin typeface="Calibri"/>
+              </a:rPr>
+              <a:t> Project Overview Manual</a:t>
             </a:r>
           </a:p>
           <a:p>
@@ -5570,13 +6627,31 @@
               </a:spcAft>
             </a:pPr>
             <a:r>
-              <a:rPr sz="1200" b="0" i="0">
+              <a:rPr sz="1600" b="0" i="0" dirty="0">
                 <a:solidFill>
                   <a:srgbClr val="663399"/>
                 </a:solidFill>
                 <a:latin typeface="Consolas"/>
               </a:rPr>
-              <a:t>docs.yoctoproject.org/scarthgap/overview-manual/</a:t>
+              <a:t>docs.yoctoproject.org/</a:t>
+            </a:r>
+            <a:r>
+              <a:rPr sz="1600" b="0" i="0" dirty="0" err="1">
+                <a:solidFill>
+                  <a:srgbClr val="663399"/>
+                </a:solidFill>
+                <a:latin typeface="Consolas"/>
+              </a:rPr>
+              <a:t>scarthgap</a:t>
+            </a:r>
+            <a:r>
+              <a:rPr sz="1600" b="0" i="0" dirty="0">
+                <a:solidFill>
+                  <a:srgbClr val="663399"/>
+                </a:solidFill>
+                <a:latin typeface="Consolas"/>
+              </a:rPr>
+              <a:t>/overview-manual/</a:t>
             </a:r>
           </a:p>
           <a:p>
@@ -5586,13 +6661,22 @@
               </a:spcAft>
             </a:pPr>
             <a:r>
-              <a:rPr sz="1400" b="1" i="0">
+              <a:rPr b="1" i="0" dirty="0" err="1">
                 <a:solidFill>
                   <a:srgbClr val="CC0066"/>
                 </a:solidFill>
                 <a:latin typeface="Calibri"/>
               </a:rPr>
-              <a:t>BitBake User Manual — chapters 1-3</a:t>
+              <a:t>BitBake</a:t>
+            </a:r>
+            <a:r>
+              <a:rPr b="1" i="0" dirty="0">
+                <a:solidFill>
+                  <a:srgbClr val="CC0066"/>
+                </a:solidFill>
+                <a:latin typeface="Calibri"/>
+              </a:rPr>
+              <a:t> User Manual — chapters 1-3</a:t>
             </a:r>
           </a:p>
           <a:p>
@@ -5602,13 +6686,49 @@
               </a:spcAft>
             </a:pPr>
             <a:r>
-              <a:rPr sz="1200" b="0" i="0">
+              <a:rPr sz="1600" b="0" i="0" dirty="0">
                 <a:solidFill>
                   <a:srgbClr val="663399"/>
                 </a:solidFill>
                 <a:latin typeface="Consolas"/>
               </a:rPr>
-              <a:t>docs.yoctoproject.org/scarthgap/bitbake/</a:t>
+              <a:t>docs.yoctoproject.org/</a:t>
+            </a:r>
+            <a:r>
+              <a:rPr sz="1600" b="0" i="0" dirty="0" err="1">
+                <a:solidFill>
+                  <a:srgbClr val="663399"/>
+                </a:solidFill>
+                <a:latin typeface="Consolas"/>
+              </a:rPr>
+              <a:t>scarthgap</a:t>
+            </a:r>
+            <a:r>
+              <a:rPr sz="1600" b="0" i="0" dirty="0">
+                <a:solidFill>
+                  <a:srgbClr val="663399"/>
+                </a:solidFill>
+                <a:latin typeface="Consolas"/>
+              </a:rPr>
+              <a:t>/</a:t>
+            </a:r>
+            <a:r>
+              <a:rPr sz="1600" b="0" i="0" dirty="0" err="1">
+                <a:solidFill>
+                  <a:srgbClr val="663399"/>
+                </a:solidFill>
+                <a:latin typeface="Consolas"/>
+              </a:rPr>
+              <a:t>bitbake</a:t>
+            </a:r>
+            <a:r>
+              <a:rPr sz="1600" b="0" i="0" dirty="0">
+                <a:solidFill>
+                  <a:srgbClr val="663399"/>
+                </a:solidFill>
+                <a:latin typeface="Consolas"/>
+              </a:rPr>
+              <a:t>/</a:t>
             </a:r>
           </a:p>
           <a:p>
@@ -5618,13 +6738,40 @@
               </a:spcAft>
             </a:pPr>
             <a:r>
-              <a:rPr sz="1400" b="1" i="0">
+              <a:rPr b="1" i="0" dirty="0" err="1">
                 <a:solidFill>
                   <a:srgbClr val="CC0066"/>
                 </a:solidFill>
                 <a:latin typeface="Calibri"/>
               </a:rPr>
-              <a:t>Bootlin Yocto training slides (free)</a:t>
+              <a:t>Bootlin</a:t>
+            </a:r>
+            <a:r>
+              <a:rPr b="1" i="0" dirty="0">
+                <a:solidFill>
+                  <a:srgbClr val="CC0066"/>
+                </a:solidFill>
+                <a:latin typeface="Calibri"/>
+              </a:rPr>
+              <a:t> </a:t>
+            </a:r>
+            <a:r>
+              <a:rPr b="1" i="0" dirty="0" err="1">
+                <a:solidFill>
+                  <a:srgbClr val="CC0066"/>
+                </a:solidFill>
+                <a:latin typeface="Calibri"/>
+              </a:rPr>
+              <a:t>Yocto</a:t>
+            </a:r>
+            <a:r>
+              <a:rPr b="1" i="0" dirty="0">
+                <a:solidFill>
+                  <a:srgbClr val="CC0066"/>
+                </a:solidFill>
+                <a:latin typeface="Calibri"/>
+              </a:rPr>
+              <a:t> training slides (free)</a:t>
             </a:r>
           </a:p>
           <a:p>
@@ -5634,13 +6781,31 @@
               </a:spcAft>
             </a:pPr>
             <a:r>
-              <a:rPr sz="1200" b="0" i="0">
+              <a:rPr sz="1600" b="0" i="0" dirty="0">
                 <a:solidFill>
                   <a:srgbClr val="663399"/>
                 </a:solidFill>
                 <a:latin typeface="Consolas"/>
               </a:rPr>
-              <a:t>bootlin.com/doc/training/yocto/</a:t>
+              <a:t>bootlin.com/doc/training/</a:t>
+            </a:r>
+            <a:r>
+              <a:rPr sz="1600" b="0" i="0" dirty="0" err="1">
+                <a:solidFill>
+                  <a:srgbClr val="663399"/>
+                </a:solidFill>
+                <a:latin typeface="Consolas"/>
+              </a:rPr>
+              <a:t>yocto</a:t>
+            </a:r>
+            <a:r>
+              <a:rPr sz="1600" b="0" i="0" dirty="0">
+                <a:solidFill>
+                  <a:srgbClr val="663399"/>
+                </a:solidFill>
+                <a:latin typeface="Consolas"/>
+              </a:rPr>
+              <a:t>/</a:t>
             </a:r>
           </a:p>
           <a:p>
@@ -5650,7 +6815,7 @@
               </a:spcAft>
             </a:pPr>
             <a:r>
-              <a:rPr sz="1300" b="0" i="1">
+              <a:rPr sz="1600" b="0" i="1" dirty="0">
                 <a:solidFill>
                   <a:srgbClr val="666666"/>
                 </a:solidFill>
@@ -5698,928 +6863,18 @@
           </a:fontRef>
         </p:style>
         <p:txBody>
-          <a:bodyPr rtlCol="0" anchor="ctr" lIns="228600" rIns="228600" wrap="square"/>
+          <a:bodyPr wrap="square" lIns="228600" rIns="228600" rtlCol="0" anchor="ctr"/>
           <a:lstStyle/>
           <a:p>
             <a:pPr algn="l"/>
             <a:r>
-              <a:rPr sz="1400" b="1">
+              <a:rPr sz="1600" b="1" dirty="0">
                 <a:solidFill>
                   <a:srgbClr val="663399"/>
                 </a:solidFill>
                 <a:latin typeface="Calibri"/>
               </a:rPr>
               <a:t>Get a good night's sleep — Day 2 is the densest day of the course.</a:t>
-            </a:r>
-          </a:p>
-        </p:txBody>
-      </p:sp>
-    </p:spTree>
-  </p:cSld>
-  <p:clrMapOvr>
-    <a:masterClrMapping/>
-  </p:clrMapOvr>
-</p:sld>
-</file>
-
-<file path=ppt/slides/slide7.xml><?xml version="1.0" encoding="utf-8"?>
-<p:sld xmlns:a="http://schemas.openxmlformats.org/drawingml/2006/main" xmlns:p="http://schemas.openxmlformats.org/presentationml/2006/main" xmlns:r="http://schemas.openxmlformats.org/officeDocument/2006/relationships">
-  <p:cSld>
-    <p:spTree>
-      <p:nvGrpSpPr>
-        <p:cNvPr id="1" name=""/>
-        <p:cNvGrpSpPr/>
-        <p:nvPr/>
-      </p:nvGrpSpPr>
-      <p:grpSpPr/>
-      <p:sp>
-        <p:nvSpPr>
-          <p:cNvPr id="2" name="Title 1"/>
-          <p:cNvSpPr>
-            <a:spLocks noGrp="1"/>
-          </p:cNvSpPr>
-          <p:nvPr>
-            <p:ph type="ctrTitle"/>
-          </p:nvPr>
-        </p:nvSpPr>
-        <p:spPr/>
-        <p:txBody>
-          <a:bodyPr/>
-          <a:lstStyle/>
-          <a:p>
-            <a:r>
-              <a:rPr sz="4400" b="1">
-                <a:solidFill>
-                  <a:srgbClr val="FFFFFF"/>
-                </a:solidFill>
-                <a:latin typeface="Calibri"/>
-              </a:rPr>
-              <a:t>Day 1 Recap &amp; Day 2 Preview</a:t>
-            </a:r>
-          </a:p>
-        </p:txBody>
-      </p:sp>
-      <p:sp>
-        <p:nvSpPr>
-          <p:cNvPr id="3" name="Subtitle 2"/>
-          <p:cNvSpPr>
-            <a:spLocks noGrp="1"/>
-          </p:cNvSpPr>
-          <p:nvPr>
-            <p:ph type="subTitle" idx="1"/>
-          </p:nvPr>
-        </p:nvSpPr>
-        <p:spPr/>
-        <p:txBody>
-          <a:bodyPr/>
-          <a:lstStyle/>
-          <a:p>
-            <a:r>
-              <a:rPr sz="2200" i="1">
-                <a:solidFill>
-                  <a:srgbClr val="FFFFFF"/>
-                </a:solidFill>
-                <a:latin typeface="Calibri"/>
-              </a:rPr>
-              <a:t>Day 1 • Session 8 • 15 minutes</a:t>
-            </a:r>
-          </a:p>
-          <a:p>
-            <a:r>
-              <a:rPr sz="1800">
-                <a:solidFill>
-                  <a:srgbClr val="FFFFFF"/>
-                </a:solidFill>
-                <a:latin typeface="Calibri"/>
-              </a:rPr>
-              <a:t>What you learned, what's next</a:t>
-            </a:r>
-          </a:p>
-        </p:txBody>
-      </p:sp>
-    </p:spTree>
-  </p:cSld>
-  <p:clrMapOvr>
-    <a:masterClrMapping/>
-  </p:clrMapOvr>
-</p:sld>
-</file>
-
-<file path=ppt/slides/slide8.xml><?xml version="1.0" encoding="utf-8"?>
-<p:sld xmlns:a="http://schemas.openxmlformats.org/drawingml/2006/main" xmlns:p="http://schemas.openxmlformats.org/presentationml/2006/main" xmlns:r="http://schemas.openxmlformats.org/officeDocument/2006/relationships">
-  <p:cSld>
-    <p:spTree>
-      <p:nvGrpSpPr>
-        <p:cNvPr id="1" name=""/>
-        <p:cNvGrpSpPr/>
-        <p:nvPr/>
-      </p:nvGrpSpPr>
-      <p:grpSpPr/>
-      <p:sp>
-        <p:nvSpPr>
-          <p:cNvPr id="2" name="Title 1"/>
-          <p:cNvSpPr>
-            <a:spLocks noGrp="1"/>
-          </p:cNvSpPr>
-          <p:nvPr>
-            <p:ph type="title"/>
-          </p:nvPr>
-        </p:nvSpPr>
-        <p:spPr/>
-        <p:txBody>
-          <a:bodyPr/>
-          <a:lstStyle/>
-          <a:p>
-            <a:r>
-              <a:rPr sz="3200" b="1">
-                <a:solidFill>
-                  <a:srgbClr val="CC0066"/>
-                </a:solidFill>
-                <a:latin typeface="Calibri"/>
-              </a:rPr>
-              <a:t>Session Agenda</a:t>
-            </a:r>
-          </a:p>
-        </p:txBody>
-      </p:sp>
-      <p:sp>
-        <p:nvSpPr>
-          <p:cNvPr id="3" name="TextBox 2"/>
-          <p:cNvSpPr txBox="1"/>
-          <p:nvPr/>
-        </p:nvSpPr>
-        <p:spPr>
-          <a:xfrm>
-            <a:off x="822960" y="1463040"/>
-            <a:ext cx="10515600" cy="5029200"/>
-          </a:xfrm>
-          <a:prstGeom prst="rect">
-            <a:avLst/>
-          </a:prstGeom>
-          <a:noFill/>
-        </p:spPr>
-        <p:txBody>
-          <a:bodyPr wrap="square" lIns="45720" rIns="45720">
-            <a:spAutoFit/>
-          </a:bodyPr>
-          <a:lstStyle/>
-          <a:p>
-            <a:pPr>
-              <a:spcAft>
-                <a:spcPts val="600"/>
-              </a:spcAft>
-            </a:pPr>
-            <a:r>
-              <a:rPr sz="2000" b="0" i="0">
-                <a:solidFill>
-                  <a:srgbClr val="333333"/>
-                </a:solidFill>
-                <a:latin typeface="Calibri"/>
-              </a:rPr>
-              <a:t>1.  What you accomplished today</a:t>
-            </a:r>
-          </a:p>
-          <a:p>
-            <a:pPr>
-              <a:spcAft>
-                <a:spcPts val="600"/>
-              </a:spcAft>
-            </a:pPr>
-            <a:r>
-              <a:rPr sz="2000" b="0" i="0">
-                <a:solidFill>
-                  <a:srgbClr val="333333"/>
-                </a:solidFill>
-                <a:latin typeface="Calibri"/>
-              </a:rPr>
-              <a:t>2.  Concept map — how today's pieces fit</a:t>
-            </a:r>
-          </a:p>
-          <a:p>
-            <a:pPr>
-              <a:spcAft>
-                <a:spcPts val="600"/>
-              </a:spcAft>
-            </a:pPr>
-            <a:r>
-              <a:rPr sz="2000" b="0" i="0">
-                <a:solidFill>
-                  <a:srgbClr val="333333"/>
-                </a:solidFill>
-                <a:latin typeface="Calibri"/>
-              </a:rPr>
-              <a:t>3.  Day 2 preview</a:t>
-            </a:r>
-          </a:p>
-          <a:p>
-            <a:pPr>
-              <a:spcAft>
-                <a:spcPts val="600"/>
-              </a:spcAft>
-            </a:pPr>
-            <a:r>
-              <a:rPr sz="2000" b="0" i="0">
-                <a:solidFill>
-                  <a:srgbClr val="333333"/>
-                </a:solidFill>
-                <a:latin typeface="Calibri"/>
-              </a:rPr>
-              <a:t>4.  Tonight's optional reading</a:t>
-            </a:r>
-          </a:p>
-        </p:txBody>
-      </p:sp>
-    </p:spTree>
-  </p:cSld>
-  <p:clrMapOvr>
-    <a:masterClrMapping/>
-  </p:clrMapOvr>
-</p:sld>
-</file>
-
-<file path=ppt/slides/slide9.xml><?xml version="1.0" encoding="utf-8"?>
-<p:sld xmlns:a="http://schemas.openxmlformats.org/drawingml/2006/main" xmlns:p="http://schemas.openxmlformats.org/presentationml/2006/main" xmlns:r="http://schemas.openxmlformats.org/officeDocument/2006/relationships">
-  <p:cSld>
-    <p:spTree>
-      <p:nvGrpSpPr>
-        <p:cNvPr id="1" name=""/>
-        <p:cNvGrpSpPr/>
-        <p:nvPr/>
-      </p:nvGrpSpPr>
-      <p:grpSpPr/>
-      <p:sp>
-        <p:nvSpPr>
-          <p:cNvPr id="2" name="Title 1"/>
-          <p:cNvSpPr>
-            <a:spLocks noGrp="1"/>
-          </p:cNvSpPr>
-          <p:nvPr>
-            <p:ph type="title"/>
-          </p:nvPr>
-        </p:nvSpPr>
-        <p:spPr/>
-        <p:txBody>
-          <a:bodyPr/>
-          <a:lstStyle/>
-          <a:p>
-            <a:r>
-              <a:rPr sz="3200" b="1">
-                <a:solidFill>
-                  <a:srgbClr val="CC0066"/>
-                </a:solidFill>
-                <a:latin typeface="Calibri"/>
-              </a:rPr>
-              <a:t>Today's Accomplishments</a:t>
-            </a:r>
-          </a:p>
-        </p:txBody>
-      </p:sp>
-      <p:sp>
-        <p:nvSpPr>
-          <p:cNvPr id="3" name="TextBox 2"/>
-          <p:cNvSpPr txBox="1"/>
-          <p:nvPr/>
-        </p:nvSpPr>
-        <p:spPr>
-          <a:xfrm>
-            <a:off x="822960" y="1417320"/>
-            <a:ext cx="10515600" cy="365760"/>
-          </a:xfrm>
-          <a:prstGeom prst="rect">
-            <a:avLst/>
-          </a:prstGeom>
-          <a:noFill/>
-        </p:spPr>
-        <p:txBody>
-          <a:bodyPr wrap="square" anchor="t" lIns="45720" rIns="45720">
-            <a:spAutoFit/>
-          </a:bodyPr>
-          <a:lstStyle/>
-          <a:p>
-            <a:pPr algn="l"/>
-            <a:r>
-              <a:rPr sz="1500" b="0" i="1">
-                <a:solidFill>
-                  <a:srgbClr val="666666"/>
-                </a:solidFill>
-                <a:latin typeface="Calibri"/>
-              </a:rPr>
-              <a:t>What every participant should have done by now.</a:t>
-            </a:r>
-          </a:p>
-        </p:txBody>
-      </p:sp>
-      <p:sp>
-        <p:nvSpPr>
-          <p:cNvPr id="4" name="Rounded Rectangle 3"/>
-          <p:cNvSpPr/>
-          <p:nvPr/>
-        </p:nvSpPr>
-        <p:spPr>
-          <a:xfrm>
-            <a:off x="822960" y="1874519"/>
-            <a:ext cx="457200" cy="548640"/>
-          </a:xfrm>
-          <a:prstGeom prst="roundRect">
-            <a:avLst/>
-          </a:prstGeom>
-          <a:solidFill>
-            <a:srgbClr val="663399"/>
-          </a:solidFill>
-          <a:ln>
-            <a:noFill/>
-          </a:ln>
-          <a:effectLst/>
-        </p:spPr>
-        <p:style>
-          <a:lnRef idx="1">
-            <a:schemeClr val="accent1"/>
-          </a:lnRef>
-          <a:fillRef idx="3">
-            <a:schemeClr val="accent1"/>
-          </a:fillRef>
-          <a:effectRef idx="2">
-            <a:schemeClr val="accent1"/>
-          </a:effectRef>
-          <a:fontRef idx="minor">
-            <a:schemeClr val="lt1"/>
-          </a:fontRef>
-        </p:style>
-        <p:txBody>
-          <a:bodyPr rtlCol="0" anchor="ctr" lIns="0" rIns="0"/>
-          <a:lstStyle/>
-          <a:p>
-            <a:pPr algn="ctr"/>
-            <a:r>
-              <a:rPr sz="2200" b="1">
-                <a:solidFill>
-                  <a:srgbClr val="FFFFFF"/>
-                </a:solidFill>
-                <a:latin typeface="Calibri"/>
-              </a:rPr>
-              <a:t>1</a:t>
-            </a:r>
-          </a:p>
-        </p:txBody>
-      </p:sp>
-      <p:sp>
-        <p:nvSpPr>
-          <p:cNvPr id="5" name="TextBox 4"/>
-          <p:cNvSpPr txBox="1"/>
-          <p:nvPr/>
-        </p:nvSpPr>
-        <p:spPr>
-          <a:xfrm>
-            <a:off x="1417320" y="1874519"/>
-            <a:ext cx="10058400" cy="320040"/>
-          </a:xfrm>
-          <a:prstGeom prst="rect">
-            <a:avLst/>
-          </a:prstGeom>
-          <a:noFill/>
-        </p:spPr>
-        <p:txBody>
-          <a:bodyPr wrap="square" anchor="t" lIns="45720" rIns="45720">
-            <a:spAutoFit/>
-          </a:bodyPr>
-          <a:lstStyle/>
-          <a:p>
-            <a:pPr algn="l"/>
-            <a:r>
-              <a:rPr sz="1600" b="1" i="0">
-                <a:solidFill>
-                  <a:srgbClr val="CC0066"/>
-                </a:solidFill>
-                <a:latin typeface="Calibri"/>
-              </a:rPr>
-              <a:t>Linux fundamentals refreshed</a:t>
-            </a:r>
-          </a:p>
-        </p:txBody>
-      </p:sp>
-      <p:sp>
-        <p:nvSpPr>
-          <p:cNvPr id="6" name="TextBox 5"/>
-          <p:cNvSpPr txBox="1"/>
-          <p:nvPr/>
-        </p:nvSpPr>
-        <p:spPr>
-          <a:xfrm>
-            <a:off x="1417320" y="2185415"/>
-            <a:ext cx="10058400" cy="320040"/>
-          </a:xfrm>
-          <a:prstGeom prst="rect">
-            <a:avLst/>
-          </a:prstGeom>
-          <a:noFill/>
-        </p:spPr>
-        <p:txBody>
-          <a:bodyPr wrap="square" anchor="t" lIns="45720" rIns="45720">
-            <a:spAutoFit/>
-          </a:bodyPr>
-          <a:lstStyle/>
-          <a:p>
-            <a:pPr algn="l"/>
-            <a:r>
-              <a:rPr sz="1300" b="0" i="0">
-                <a:solidFill>
-                  <a:srgbClr val="333333"/>
-                </a:solidFill>
-                <a:latin typeface="Calibri"/>
-              </a:rPr>
-              <a:t>Filesystem, processes, systemd, networking, troubleshooting</a:t>
-            </a:r>
-          </a:p>
-        </p:txBody>
-      </p:sp>
-      <p:sp>
-        <p:nvSpPr>
-          <p:cNvPr id="7" name="Rounded Rectangle 6"/>
-          <p:cNvSpPr/>
-          <p:nvPr/>
-        </p:nvSpPr>
-        <p:spPr>
-          <a:xfrm>
-            <a:off x="822960" y="2587752"/>
-            <a:ext cx="457200" cy="548640"/>
-          </a:xfrm>
-          <a:prstGeom prst="roundRect">
-            <a:avLst/>
-          </a:prstGeom>
-          <a:solidFill>
-            <a:srgbClr val="663399"/>
-          </a:solidFill>
-          <a:ln>
-            <a:noFill/>
-          </a:ln>
-          <a:effectLst/>
-        </p:spPr>
-        <p:style>
-          <a:lnRef idx="1">
-            <a:schemeClr val="accent1"/>
-          </a:lnRef>
-          <a:fillRef idx="3">
-            <a:schemeClr val="accent1"/>
-          </a:fillRef>
-          <a:effectRef idx="2">
-            <a:schemeClr val="accent1"/>
-          </a:effectRef>
-          <a:fontRef idx="minor">
-            <a:schemeClr val="lt1"/>
-          </a:fontRef>
-        </p:style>
-        <p:txBody>
-          <a:bodyPr rtlCol="0" anchor="ctr" lIns="0" rIns="0"/>
-          <a:lstStyle/>
-          <a:p>
-            <a:pPr algn="ctr"/>
-            <a:r>
-              <a:rPr sz="2200" b="1">
-                <a:solidFill>
-                  <a:srgbClr val="FFFFFF"/>
-                </a:solidFill>
-                <a:latin typeface="Calibri"/>
-              </a:rPr>
-              <a:t>2</a:t>
-            </a:r>
-          </a:p>
-        </p:txBody>
-      </p:sp>
-      <p:sp>
-        <p:nvSpPr>
-          <p:cNvPr id="8" name="TextBox 7"/>
-          <p:cNvSpPr txBox="1"/>
-          <p:nvPr/>
-        </p:nvSpPr>
-        <p:spPr>
-          <a:xfrm>
-            <a:off x="1417320" y="2587752"/>
-            <a:ext cx="10058400" cy="320040"/>
-          </a:xfrm>
-          <a:prstGeom prst="rect">
-            <a:avLst/>
-          </a:prstGeom>
-          <a:noFill/>
-        </p:spPr>
-        <p:txBody>
-          <a:bodyPr wrap="square" anchor="t" lIns="45720" rIns="45720">
-            <a:spAutoFit/>
-          </a:bodyPr>
-          <a:lstStyle/>
-          <a:p>
-            <a:pPr algn="l"/>
-            <a:r>
-              <a:rPr sz="1600" b="1" i="0">
-                <a:solidFill>
-                  <a:srgbClr val="CC0066"/>
-                </a:solidFill>
-                <a:latin typeface="Calibri"/>
-              </a:rPr>
-              <a:t>Yocto's place in the landscape clarified</a:t>
-            </a:r>
-          </a:p>
-        </p:txBody>
-      </p:sp>
-      <p:sp>
-        <p:nvSpPr>
-          <p:cNvPr id="9" name="TextBox 8"/>
-          <p:cNvSpPr txBox="1"/>
-          <p:nvPr/>
-        </p:nvSpPr>
-        <p:spPr>
-          <a:xfrm>
-            <a:off x="1417320" y="2898648"/>
-            <a:ext cx="10058400" cy="320040"/>
-          </a:xfrm>
-          <a:prstGeom prst="rect">
-            <a:avLst/>
-          </a:prstGeom>
-          <a:noFill/>
-        </p:spPr>
-        <p:txBody>
-          <a:bodyPr wrap="square" anchor="t" lIns="45720" rIns="45720">
-            <a:spAutoFit/>
-          </a:bodyPr>
-          <a:lstStyle/>
-          <a:p>
-            <a:pPr algn="l"/>
-            <a:r>
-              <a:rPr sz="1300" b="0" i="0">
-                <a:solidFill>
-                  <a:srgbClr val="333333"/>
-                </a:solidFill>
-                <a:latin typeface="Calibri"/>
-              </a:rPr>
-              <a:t>Buildroot vs Yocto, cross-compile fundamentals, target triples</a:t>
-            </a:r>
-          </a:p>
-        </p:txBody>
-      </p:sp>
-      <p:sp>
-        <p:nvSpPr>
-          <p:cNvPr id="10" name="Rounded Rectangle 9"/>
-          <p:cNvSpPr/>
-          <p:nvPr/>
-        </p:nvSpPr>
-        <p:spPr>
-          <a:xfrm>
-            <a:off x="822960" y="3300984"/>
-            <a:ext cx="457200" cy="548640"/>
-          </a:xfrm>
-          <a:prstGeom prst="roundRect">
-            <a:avLst/>
-          </a:prstGeom>
-          <a:solidFill>
-            <a:srgbClr val="663399"/>
-          </a:solidFill>
-          <a:ln>
-            <a:noFill/>
-          </a:ln>
-          <a:effectLst/>
-        </p:spPr>
-        <p:style>
-          <a:lnRef idx="1">
-            <a:schemeClr val="accent1"/>
-          </a:lnRef>
-          <a:fillRef idx="3">
-            <a:schemeClr val="accent1"/>
-          </a:fillRef>
-          <a:effectRef idx="2">
-            <a:schemeClr val="accent1"/>
-          </a:effectRef>
-          <a:fontRef idx="minor">
-            <a:schemeClr val="lt1"/>
-          </a:fontRef>
-        </p:style>
-        <p:txBody>
-          <a:bodyPr rtlCol="0" anchor="ctr" lIns="0" rIns="0"/>
-          <a:lstStyle/>
-          <a:p>
-            <a:pPr algn="ctr"/>
-            <a:r>
-              <a:rPr sz="2200" b="1">
-                <a:solidFill>
-                  <a:srgbClr val="FFFFFF"/>
-                </a:solidFill>
-                <a:latin typeface="Calibri"/>
-              </a:rPr>
-              <a:t>3</a:t>
-            </a:r>
-          </a:p>
-        </p:txBody>
-      </p:sp>
-      <p:sp>
-        <p:nvSpPr>
-          <p:cNvPr id="11" name="TextBox 10"/>
-          <p:cNvSpPr txBox="1"/>
-          <p:nvPr/>
-        </p:nvSpPr>
-        <p:spPr>
-          <a:xfrm>
-            <a:off x="1417320" y="3300984"/>
-            <a:ext cx="10058400" cy="320040"/>
-          </a:xfrm>
-          <a:prstGeom prst="rect">
-            <a:avLst/>
-          </a:prstGeom>
-          <a:noFill/>
-        </p:spPr>
-        <p:txBody>
-          <a:bodyPr wrap="square" anchor="t" lIns="45720" rIns="45720">
-            <a:spAutoFit/>
-          </a:bodyPr>
-          <a:lstStyle/>
-          <a:p>
-            <a:pPr algn="l"/>
-            <a:r>
-              <a:rPr sz="1600" b="1" i="0">
-                <a:solidFill>
-                  <a:srgbClr val="CC0066"/>
-                </a:solidFill>
-                <a:latin typeface="Calibri"/>
-              </a:rPr>
-              <a:t>Mental model of Yocto built</a:t>
-            </a:r>
-          </a:p>
-        </p:txBody>
-      </p:sp>
-      <p:sp>
-        <p:nvSpPr>
-          <p:cNvPr id="12" name="TextBox 11"/>
-          <p:cNvSpPr txBox="1"/>
-          <p:nvPr/>
-        </p:nvSpPr>
-        <p:spPr>
-          <a:xfrm>
-            <a:off x="1417320" y="3611879"/>
-            <a:ext cx="10058400" cy="320040"/>
-          </a:xfrm>
-          <a:prstGeom prst="rect">
-            <a:avLst/>
-          </a:prstGeom>
-          <a:noFill/>
-        </p:spPr>
-        <p:txBody>
-          <a:bodyPr wrap="square" anchor="t" lIns="45720" rIns="45720">
-            <a:spAutoFit/>
-          </a:bodyPr>
-          <a:lstStyle/>
-          <a:p>
-            <a:pPr algn="l"/>
-            <a:r>
-              <a:rPr sz="1300" b="0" i="0">
-                <a:solidFill>
-                  <a:srgbClr val="333333"/>
-                </a:solidFill>
-                <a:latin typeface="Calibri"/>
-              </a:rPr>
-              <a:t>Poky, OE-Core, BitBake, layers, recipes, tasks, sstate, MACHINE/DISTRO/IMAGE</a:t>
-            </a:r>
-          </a:p>
-        </p:txBody>
-      </p:sp>
-      <p:sp>
-        <p:nvSpPr>
-          <p:cNvPr id="13" name="Rounded Rectangle 12"/>
-          <p:cNvSpPr/>
-          <p:nvPr/>
-        </p:nvSpPr>
-        <p:spPr>
-          <a:xfrm>
-            <a:off x="822960" y="4014215"/>
-            <a:ext cx="457200" cy="548640"/>
-          </a:xfrm>
-          <a:prstGeom prst="roundRect">
-            <a:avLst/>
-          </a:prstGeom>
-          <a:solidFill>
-            <a:srgbClr val="663399"/>
-          </a:solidFill>
-          <a:ln>
-            <a:noFill/>
-          </a:ln>
-          <a:effectLst/>
-        </p:spPr>
-        <p:style>
-          <a:lnRef idx="1">
-            <a:schemeClr val="accent1"/>
-          </a:lnRef>
-          <a:fillRef idx="3">
-            <a:schemeClr val="accent1"/>
-          </a:fillRef>
-          <a:effectRef idx="2">
-            <a:schemeClr val="accent1"/>
-          </a:effectRef>
-          <a:fontRef idx="minor">
-            <a:schemeClr val="lt1"/>
-          </a:fontRef>
-        </p:style>
-        <p:txBody>
-          <a:bodyPr rtlCol="0" anchor="ctr" lIns="0" rIns="0"/>
-          <a:lstStyle/>
-          <a:p>
-            <a:pPr algn="ctr"/>
-            <a:r>
-              <a:rPr sz="2200" b="1">
-                <a:solidFill>
-                  <a:srgbClr val="FFFFFF"/>
-                </a:solidFill>
-                <a:latin typeface="Calibri"/>
-              </a:rPr>
-              <a:t>4</a:t>
-            </a:r>
-          </a:p>
-        </p:txBody>
-      </p:sp>
-      <p:sp>
-        <p:nvSpPr>
-          <p:cNvPr id="14" name="TextBox 13"/>
-          <p:cNvSpPr txBox="1"/>
-          <p:nvPr/>
-        </p:nvSpPr>
-        <p:spPr>
-          <a:xfrm>
-            <a:off x="1417320" y="4014215"/>
-            <a:ext cx="10058400" cy="320040"/>
-          </a:xfrm>
-          <a:prstGeom prst="rect">
-            <a:avLst/>
-          </a:prstGeom>
-          <a:noFill/>
-        </p:spPr>
-        <p:txBody>
-          <a:bodyPr wrap="square" anchor="t" lIns="45720" rIns="45720">
-            <a:spAutoFit/>
-          </a:bodyPr>
-          <a:lstStyle/>
-          <a:p>
-            <a:pPr algn="l"/>
-            <a:r>
-              <a:rPr sz="1600" b="1" i="0">
-                <a:solidFill>
-                  <a:srgbClr val="CC0066"/>
-                </a:solidFill>
-                <a:latin typeface="Calibri"/>
-              </a:rPr>
-              <a:t>BitBake internals understood at usage depth</a:t>
-            </a:r>
-          </a:p>
-        </p:txBody>
-      </p:sp>
-      <p:sp>
-        <p:nvSpPr>
-          <p:cNvPr id="15" name="TextBox 14"/>
-          <p:cNvSpPr txBox="1"/>
-          <p:nvPr/>
-        </p:nvSpPr>
-        <p:spPr>
-          <a:xfrm>
-            <a:off x="1417320" y="4325112"/>
-            <a:ext cx="10058400" cy="320040"/>
-          </a:xfrm>
-          <a:prstGeom prst="rect">
-            <a:avLst/>
-          </a:prstGeom>
-          <a:noFill/>
-        </p:spPr>
-        <p:txBody>
-          <a:bodyPr wrap="square" anchor="t" lIns="45720" rIns="45720">
-            <a:spAutoFit/>
-          </a:bodyPr>
-          <a:lstStyle/>
-          <a:p>
-            <a:pPr algn="l"/>
-            <a:r>
-              <a:rPr sz="1300" b="0" i="0">
-                <a:solidFill>
-                  <a:srgbClr val="333333"/>
-                </a:solidFill>
-                <a:latin typeface="Calibri"/>
-              </a:rPr>
-              <a:t>Parse-plan-execute, variable operators, overrides, config files</a:t>
-            </a:r>
-          </a:p>
-        </p:txBody>
-      </p:sp>
-      <p:sp>
-        <p:nvSpPr>
-          <p:cNvPr id="16" name="Rounded Rectangle 15"/>
-          <p:cNvSpPr/>
-          <p:nvPr/>
-        </p:nvSpPr>
-        <p:spPr>
-          <a:xfrm>
-            <a:off x="822960" y="4727448"/>
-            <a:ext cx="457200" cy="548640"/>
-          </a:xfrm>
-          <a:prstGeom prst="roundRect">
-            <a:avLst/>
-          </a:prstGeom>
-          <a:solidFill>
-            <a:srgbClr val="663399"/>
-          </a:solidFill>
-          <a:ln>
-            <a:noFill/>
-          </a:ln>
-          <a:effectLst/>
-        </p:spPr>
-        <p:style>
-          <a:lnRef idx="1">
-            <a:schemeClr val="accent1"/>
-          </a:lnRef>
-          <a:fillRef idx="3">
-            <a:schemeClr val="accent1"/>
-          </a:fillRef>
-          <a:effectRef idx="2">
-            <a:schemeClr val="accent1"/>
-          </a:effectRef>
-          <a:fontRef idx="minor">
-            <a:schemeClr val="lt1"/>
-          </a:fontRef>
-        </p:style>
-        <p:txBody>
-          <a:bodyPr rtlCol="0" anchor="ctr" lIns="0" rIns="0"/>
-          <a:lstStyle/>
-          <a:p>
-            <a:pPr algn="ctr"/>
-            <a:r>
-              <a:rPr sz="2200" b="1">
-                <a:solidFill>
-                  <a:srgbClr val="FFFFFF"/>
-                </a:solidFill>
-                <a:latin typeface="Calibri"/>
-              </a:rPr>
-              <a:t>5</a:t>
-            </a:r>
-          </a:p>
-        </p:txBody>
-      </p:sp>
-      <p:sp>
-        <p:nvSpPr>
-          <p:cNvPr id="17" name="TextBox 16"/>
-          <p:cNvSpPr txBox="1"/>
-          <p:nvPr/>
-        </p:nvSpPr>
-        <p:spPr>
-          <a:xfrm>
-            <a:off x="1417320" y="4727448"/>
-            <a:ext cx="10058400" cy="320040"/>
-          </a:xfrm>
-          <a:prstGeom prst="rect">
-            <a:avLst/>
-          </a:prstGeom>
-          <a:noFill/>
-        </p:spPr>
-        <p:txBody>
-          <a:bodyPr wrap="square" anchor="t" lIns="45720" rIns="45720">
-            <a:spAutoFit/>
-          </a:bodyPr>
-          <a:lstStyle/>
-          <a:p>
-            <a:pPr algn="l"/>
-            <a:r>
-              <a:rPr sz="1600" b="1" i="0">
-                <a:solidFill>
-                  <a:srgbClr val="CC0066"/>
-                </a:solidFill>
-                <a:latin typeface="Calibri"/>
-              </a:rPr>
-              <a:t>First custom Yocto image built and booted</a:t>
-            </a:r>
-          </a:p>
-        </p:txBody>
-      </p:sp>
-      <p:sp>
-        <p:nvSpPr>
-          <p:cNvPr id="18" name="TextBox 17"/>
-          <p:cNvSpPr txBox="1"/>
-          <p:nvPr/>
-        </p:nvSpPr>
-        <p:spPr>
-          <a:xfrm>
-            <a:off x="1417320" y="5038344"/>
-            <a:ext cx="10058400" cy="320040"/>
-          </a:xfrm>
-          <a:prstGeom prst="rect">
-            <a:avLst/>
-          </a:prstGeom>
-          <a:noFill/>
-        </p:spPr>
-        <p:txBody>
-          <a:bodyPr wrap="square" anchor="t" lIns="45720" rIns="45720">
-            <a:spAutoFit/>
-          </a:bodyPr>
-          <a:lstStyle/>
-          <a:p>
-            <a:pPr algn="l"/>
-            <a:r>
-              <a:rPr sz="1300" b="0" i="0">
-                <a:solidFill>
-                  <a:srgbClr val="333333"/>
-                </a:solidFill>
-                <a:latin typeface="Calibri"/>
-              </a:rPr>
-              <a:t>meta-trainerdemo, hello-trainergw, IMAGE_INSTALL — pattern memorized</a:t>
             </a:r>
           </a:p>
         </p:txBody>
